--- a/decks/geog-asia-china/geog-asia-china_ch6_environment-world.pptx
+++ b/decks/geog-asia-china/geog-asia-china_ch6_environment-world.pptx
@@ -124,30 +124,30 @@
   <p:extLst>
     <p:ext uri="{521415D9-36F7-43E2-AB2F-B90AF26B5E84}">
       <p14:sectionLst xmlns:p14="http://schemas.microsoft.com/office/powerpoint/2010/main">
-        <p14:section name="Opening" id="{3392e103-5b66-69bf-9bd9-b04f8b07009b}">
+        <p14:section name="Opening" id="{b19af552-97ba-44a5-7fc5-668118c7b677}">
           <p14:sldIdLst>
             <p14:sldId id="256"/>
           </p14:sldIdLst>
         </p14:section>
-        <p14:section name="Gate" id="{d730f3b7-5fbe-b38f-f2c6-a5580545c623}">
+        <p14:section name="Gate" id="{21f537ef-498f-f03e-893f-658ec6ff9d2e}">
           <p14:sldIdLst>
             <p14:sldId id="257"/>
             <p14:sldId id="258"/>
           </p14:sldIdLst>
         </p14:section>
-        <p14:section name="Pre-teach" id="{eebda94e-43e4-27ba-b9b0-12d15ca15a82}">
+        <p14:section name="Pre-teach" id="{cdb7abec-a282-1a2d-b3bc-b8ad066730b8}">
           <p14:sldIdLst>
             <p14:sldId id="259"/>
             <p14:sldId id="260"/>
           </p14:sldIdLst>
         </p14:section>
-        <p14:section name="Read-along" id="{a3f6bb49-9786-11a5-4bd3-295bf2b738d8}">
+        <p14:section name="Read-along" id="{03fe489d-3333-e188-65d3-0bcf41eafdbe}">
           <p14:sldIdLst>
             <p14:sldId id="261"/>
             <p14:sldId id="262"/>
           </p14:sldIdLst>
         </p14:section>
-        <p14:section name="Teach" id="{23af7e64-d8d9-7026-2638-ec0f365f2821}">
+        <p14:section name="Teach" id="{ebd1f4b6-0560-a9f2-b43e-c3651f1288bb}">
           <p14:sldIdLst>
             <p14:sldId id="263"/>
             <p14:sldId id="264"/>
@@ -155,19 +155,19 @@
             <p14:sldId id="266"/>
           </p14:sldIdLst>
         </p14:section>
-        <p14:section name="Routes" id="{04c7f25a-d8c2-701c-460b-81ab4de8ec61}">
+        <p14:section name="Routes" id="{2ebeeb5c-44b9-209f-6445-a653a4f2484f}">
           <p14:sldIdLst>
             <p14:sldId id="267"/>
             <p14:sldId id="268"/>
             <p14:sldId id="269"/>
           </p14:sldIdLst>
         </p14:section>
-        <p14:section name="Close" id="{3ac72c42-1288-5844-6a7b-08ef6e751d47}">
+        <p14:section name="Close" id="{d1fcf972-7aec-6812-fd54-5518baa302d6}">
           <p14:sldIdLst>
             <p14:sldId id="270"/>
           </p14:sldIdLst>
         </p14:section>
-        <p14:section name="Answers" id="{486e61f5-c856-10fd-f4ed-b2c8602cc789}">
+        <p14:section name="Answers" id="{c238c9e5-4888-3130-8a7a-f374f240d15e}">
           <p14:sldIdLst>
             <p14:sldId id="271"/>
             <p14:sldId id="272"/>
